--- a/SPM_BFKIII/ro/fisiere/C01.pptx
+++ b/SPM_BFKIII/ro/fisiere/C01.pptx
@@ -538,7 +538,7 @@
           <a:lstStyle/>
           <a:p>
             <a:r>
-              <a:t>În lume, numărul fracturilor a crescut, deși riscul la aceeași vârstă a scăzut. În România, proporția brută a persoanelor care ar putea beneficia de recuperare a crescut, deși rata standardizată a scăzut: diferența vine din structura pe vârste.</a:t>
+              <a:t>În lume, numărul fracturilor a crescut, deși rata standardizată a incidenței a scăzut. În România, proporția brută a persoanelor care ar putea beneficia de recuperare a crescut, deși rata standardizată a scăzut: diferența vine din structura pe vârste.</a:t>
             </a:r>
           </a:p>
         </p:txBody>
@@ -895,7 +895,7 @@
           <a:lstStyle/>
           <a:p>
             <a:r>
-              <a:t>Pentru lombalgie, riscul la aceeași vârstă a scăzut ușor între 1990 și 2020, dar numărul persoanelor afectate crește. Accidentul vascular cerebral era, în 2021, a treia cauză de deces în lume. Căderile sunt a doua cauză de deces prin traumatisme neintenționate.</a:t>
+              <a:t>Pentru lombalgie, ratele standardizate pe vârstă au scăzut ușor între 1990 și 2020, dar numărul persoanelor afectate crește. Accidentul vascular cerebral era, în 2021, a treia cauză de deces în lume, după cardiopatia ischemică și COVID-19. Căderile sunt a doua cauză de deces prin traumatisme neintenționate.</a:t>
             </a:r>
           </a:p>
         </p:txBody>
@@ -2476,7 +2476,7 @@
           <a:lstStyle/>
           <a:p>
             <a:r>
-              <a:t>Recuperarea nu vine după prevenție: este o formă de prevenție, aplicată când boala există deja.</a:t>
+              <a:t>Recuperarea nu vine după prevenție: în logica nivelurilor, ține de prevenția terțiară, aplicată când boala există deja.</a:t>
             </a:r>
           </a:p>
         </p:txBody>
@@ -2527,7 +2527,7 @@
           <a:lstStyle/>
           <a:p>
             <a:r>
-              <a:t>În ambele glosare ale OMS, recuperarea aparține prevenției: ea previne deteriorarea, complicațiile și dizabilitatea unei boli deja instalate.</a:t>
+              <a:t>În ambele glosare ale OMS, recuperarea ține de prevenția terțiară: limitează deteriorarea, complicațiile și dizabilitatea unei boli deja instalate. Când enumeră serviciile acoperirii universale, OMS o numește separat.</a:t>
             </a:r>
           </a:p>
         </p:txBody>
@@ -12701,7 +12701,7 @@
                 <a:ea typeface="Palatino Linotype" pitchFamily="34" charset="-122"/>
                 <a:cs typeface="Palatino Linotype" pitchFamily="34" charset="-120"/>
               </a:rPr>
-              <a:t>Recuperarea ca prevenție: legea profesiei și OMS</a:t>
+              <a:t>Recuperarea și prevenția terțiară: legea profesiei și OMS</a:t>
             </a:r>
             <a:endParaRPr lang="en-US" sz="2400" dirty="0"/>
           </a:p>
@@ -21690,7 +21690,7 @@
                 </a:solidFill>
                 <a:latin typeface="Palatino Linotype"/>
               </a:rPr>
-              <a:t>previne boala, prelungește viața și promovează sănătatea prin eforturile organizate ale societății; recuperarea îi aparține</a:t>
+              <a:t>previne boala, prelungește viața și promovează sănătatea prin eforturile organizate ale societății; recuperarea îi aparține: nevoia, accesul și rezultatele se măsoară la nivelul populației</a:t>
             </a:r>
           </a:p>
         </p:txBody>
@@ -22234,7 +22234,7 @@
                 </a:solidFill>
                 <a:latin typeface="Palatino Linotype"/>
               </a:rPr>
-              <a:t>îmbătrânirea crește numărul cazurilor chiar când riscul la aceeași vârstă scade</a:t>
+              <a:t>îmbătrânirea crește numărul cazurilor chiar când rata standardizată pe vârstă scade</a:t>
             </a:r>
           </a:p>
         </p:txBody>
@@ -28654,7 +28654,7 @@
                 </a:solidFill>
                 <a:latin typeface="Palatino Linotype"/>
               </a:rPr>
-              <a:t>Numărul arată volumul de muncă; rata brută îl raportează la populație; rata standardizată arată dacă riscul la aceeași vârstă a crescut.</a:t>
+              <a:t>Numărul arată volumul de muncă; rata brută îl raportează la populație; rata standardizată compară populații cu structuri de vârstă diferite ca și cum ar avea aceeași structură.</a:t>
             </a:r>
           </a:p>
         </p:txBody>
@@ -39284,7 +39284,7 @@
                 <a:ea typeface="Palatino Linotype" pitchFamily="34" charset="-122"/>
                 <a:cs typeface="Palatino Linotype" pitchFamily="34" charset="-120"/>
               </a:rPr>
-              <a:t>Următoarea întâlnire: lucrarea practică LP01, profilul afecțiunii-ancoră (Fișa 1)</a:t>
+              <a:t>Următoarea întâlnire: cursul C02, apoi lucrarea practică LP01 (Fișa 1), vineri, 9.10</a:t>
             </a:r>
             <a:endParaRPr lang="en-US" sz="800" dirty="0"/>
           </a:p>
@@ -45910,7 +45910,7 @@
                 <a:ea typeface="Palatino Linotype" pitchFamily="34" charset="-122"/>
                 <a:cs typeface="Palatino Linotype" pitchFamily="34" charset="-120"/>
               </a:rPr>
-              <a:t>Trimisă prin e-mail la final sau în cel mult 48 de ore</a:t>
+              <a:t>Predată în Forms (cont UMF), în cel mult 48 de ore</a:t>
             </a:r>
             <a:endParaRPr lang="en-US" sz="1200" dirty="0"/>
           </a:p>
@@ -47593,7 +47593,7 @@
                 <a:ea typeface="Palatino Linotype" pitchFamily="34" charset="-122"/>
                 <a:cs typeface="Palatino Linotype" pitchFamily="34" charset="-120"/>
               </a:rPr>
-              <a:t>Materialele cursului sunt pe site-ul cursului. Fișele și erorile semnalate: adrian.pana@umfcluj.ro</a:t>
+              <a:t>Materialele cursului sunt pe site-ul cursului. Fișele: în Forms; erorile semnalate: adrian.pana@umfcluj.ro</a:t>
             </a:r>
             <a:endParaRPr lang="en-US" sz="1200" dirty="0"/>
           </a:p>
@@ -48770,7 +48770,7 @@
                 <a:ea typeface="Palatino Linotype" pitchFamily="34" charset="-122"/>
                 <a:cs typeface="Palatino Linotype" pitchFamily="34" charset="-120"/>
               </a:rPr>
-              <a:t>Ghiciți cifra!</a:t>
+              <a:t>Cât credeți că este?</a:t>
             </a:r>
             <a:endParaRPr lang="en-US" sz="2400" dirty="0"/>
           </a:p>

--- a/SPM_BFKIII/ro/fisiere/C01.pptx
+++ b/SPM_BFKIII/ro/fisiere/C01.pptx
@@ -22234,7 +22234,7 @@
                 </a:solidFill>
                 <a:latin typeface="Palatino Linotype"/>
               </a:rPr>
-              <a:t>îmbătrânirea crește numărul cazurilor chiar când rata standardizată pe vârstă scade</a:t>
+              <a:t>îmbătrânirea împinge în sus numărul cazurilor chiar când rata standardizată pe vârstă scade; contează și mărimea populației</a:t>
             </a:r>
           </a:p>
         </p:txBody>
@@ -25134,7 +25134,7 @@
                 </a:solidFill>
                 <a:latin typeface="Palatino Linotype"/>
               </a:rPr>
-              <a:t>Numai cazurile noi. Servește la evaluarea prevenției: scad căderile și fracturile noi?</a:t>
+              <a:t>Numai cazurile noi. Servește la evaluarea prevenției: scade incidența căderilor și a fracturilor?</a:t>
             </a:r>
           </a:p>
         </p:txBody>
@@ -26132,7 +26132,7 @@
                 </a:solidFill>
                 <a:latin typeface="Palatino Linotype"/>
               </a:rPr>
-              <a:t>Numitorul greșit: </a:t>
+              <a:t>Numitorul greșit în definiția cursului: </a:t>
             </a:r>
             <a:r>
               <a:rPr sz="1100" b="0" i="0">
